--- a/Dự án OurTeam/OurTeam - Slides.pptx
+++ b/Dự án OurTeam/OurTeam - Slides.pptx
@@ -233,7 +233,7 @@
           <a:p>
             <a:fld id="{C8D18E60-4300-4729-A0D7-6AB984C3922D}" type="datetimeFigureOut">
               <a:rPr lang="en-US" smtClean="0"/>
-              <a:t>12/20/2019</a:t>
+              <a:t>10/5/2024</a:t>
             </a:fld>
             <a:endParaRPr lang="en-US"/>
           </a:p>
@@ -718,7 +718,7 @@
           <a:p>
             <a:fld id="{E2237A3D-8AEE-4FB0-87BF-DEC26F80A761}" type="datetime1">
               <a:rPr lang="en-US" smtClean="0"/>
-              <a:t>12/20/2019</a:t>
+              <a:t>10/5/2024</a:t>
             </a:fld>
             <a:endParaRPr lang="en-US"/>
           </a:p>
@@ -984,7 +984,7 @@
           <a:p>
             <a:fld id="{30FEA87A-0030-4624-9F89-A66744851DE7}" type="datetime1">
               <a:rPr lang="en-US" smtClean="0"/>
-              <a:t>12/20/2019</a:t>
+              <a:t>10/5/2024</a:t>
             </a:fld>
             <a:endParaRPr lang="en-US"/>
           </a:p>
@@ -1153,7 +1153,7 @@
           <a:p>
             <a:fld id="{96BBDE4D-3EA8-406F-AA48-ED8F4F143A3B}" type="datetime1">
               <a:rPr lang="en-US" smtClean="0"/>
-              <a:t>12/20/2019</a:t>
+              <a:t>10/5/2024</a:t>
             </a:fld>
             <a:endParaRPr lang="en-US"/>
           </a:p>
@@ -1332,7 +1332,7 @@
           <a:p>
             <a:fld id="{E1879613-7121-4652-9693-15F090A8A377}" type="datetime1">
               <a:rPr lang="en-US" smtClean="0"/>
-              <a:t>12/20/2019</a:t>
+              <a:t>10/5/2024</a:t>
             </a:fld>
             <a:endParaRPr lang="en-US"/>
           </a:p>
@@ -1628,7 +1628,7 @@
           <a:p>
             <a:fld id="{B3FAD369-727D-4BE8-AE4E-15D8514A021F}" type="datetime1">
               <a:rPr lang="en-US" smtClean="0"/>
-              <a:t>12/20/2019</a:t>
+              <a:t>10/5/2024</a:t>
             </a:fld>
             <a:endParaRPr lang="en-US"/>
           </a:p>
@@ -1874,7 +1874,7 @@
           <a:p>
             <a:fld id="{878C7EC1-B36B-4A2D-B553-AC70D1F36B7C}" type="datetime1">
               <a:rPr lang="en-US" smtClean="0"/>
-              <a:t>12/20/2019</a:t>
+              <a:t>10/5/2024</a:t>
             </a:fld>
             <a:endParaRPr lang="en-US"/>
           </a:p>
@@ -2120,7 +2120,7 @@
           <a:p>
             <a:fld id="{F0294055-D9E5-4F9C-9A54-4336E1FFAC3A}" type="datetime1">
               <a:rPr lang="en-US" smtClean="0"/>
-              <a:t>12/20/2019</a:t>
+              <a:t>10/5/2024</a:t>
             </a:fld>
             <a:endParaRPr lang="en-US"/>
           </a:p>
@@ -2406,7 +2406,7 @@
           <a:p>
             <a:fld id="{B2F971D8-71CD-48D5-A190-69FFEF1A6F65}" type="datetime1">
               <a:rPr lang="en-US" smtClean="0"/>
-              <a:t>12/20/2019</a:t>
+              <a:t>10/5/2024</a:t>
             </a:fld>
             <a:endParaRPr lang="en-US"/>
           </a:p>
@@ -2892,7 +2892,7 @@
           <a:p>
             <a:fld id="{5582C1B0-F163-4C74-B337-D84EED959155}" type="datetime1">
               <a:rPr lang="en-US" smtClean="0"/>
-              <a:t>12/20/2019</a:t>
+              <a:t>10/5/2024</a:t>
             </a:fld>
             <a:endParaRPr lang="en-US"/>
           </a:p>
@@ -3010,7 +3010,7 @@
           <a:p>
             <a:fld id="{B2C030B6-9935-4734-9283-1E1F559CB273}" type="datetime1">
               <a:rPr lang="en-US" smtClean="0"/>
-              <a:t>12/20/2019</a:t>
+              <a:t>10/5/2024</a:t>
             </a:fld>
             <a:endParaRPr lang="en-US"/>
           </a:p>
@@ -3106,7 +3106,7 @@
           <a:p>
             <a:fld id="{CD7578A8-0458-4CF6-B984-FFFB1A8FFA2C}" type="datetime1">
               <a:rPr lang="en-US" smtClean="0"/>
-              <a:t>12/20/2019</a:t>
+              <a:t>10/5/2024</a:t>
             </a:fld>
             <a:endParaRPr lang="en-US"/>
           </a:p>
@@ -3382,7 +3382,7 @@
           <a:p>
             <a:fld id="{A0553344-57A1-40AD-A154-85B74E1981C9}" type="datetime1">
               <a:rPr lang="en-US" smtClean="0"/>
-              <a:t>12/20/2019</a:t>
+              <a:t>10/5/2024</a:t>
             </a:fld>
             <a:endParaRPr lang="en-US"/>
           </a:p>
@@ -3604,7 +3604,7 @@
           <a:p>
             <a:fld id="{4FB1F21D-032D-4D3B-B2E7-6068F5346A90}" type="datetime1">
               <a:rPr lang="en-US" smtClean="0"/>
-              <a:t>12/20/2019</a:t>
+              <a:t>10/5/2024</a:t>
             </a:fld>
             <a:endParaRPr lang="en-US"/>
           </a:p>
@@ -4067,7 +4067,7 @@
           <p:nvPr/>
         </p:nvPicPr>
         <p:blipFill>
-          <a:blip r:embed="rId2">
+          <a:blip r:embed="rId2" cstate="print">
             <a:extLst>
               <a:ext uri="{28A0092B-C50C-407E-A947-70E740481C1C}">
                 <a14:useLocalDpi xmlns:a14="http://schemas.microsoft.com/office/drawing/2010/main" val="0"/>
@@ -4369,7 +4369,7 @@
           <p:nvPr/>
         </p:nvPicPr>
         <p:blipFill>
-          <a:blip r:embed="rId2">
+          <a:blip r:embed="rId2" cstate="print">
             <a:extLst>
               <a:ext uri="{28A0092B-C50C-407E-A947-70E740481C1C}">
                 <a14:useLocalDpi xmlns:a14="http://schemas.microsoft.com/office/drawing/2010/main" val="0"/>
@@ -4416,7 +4416,7 @@
           <p:nvPr/>
         </p:nvPicPr>
         <p:blipFill>
-          <a:blip r:embed="rId3">
+          <a:blip r:embed="rId3" cstate="print">
             <a:extLst>
               <a:ext uri="{28A0092B-C50C-407E-A947-70E740481C1C}">
                 <a14:useLocalDpi xmlns:a14="http://schemas.microsoft.com/office/drawing/2010/main" val="0"/>
@@ -5076,7 +5076,7 @@
           <p:nvPr/>
         </p:nvPicPr>
         <p:blipFill>
-          <a:blip r:embed="rId2">
+          <a:blip r:embed="rId2" cstate="print">
             <a:extLst>
               <a:ext uri="{28A0092B-C50C-407E-A947-70E740481C1C}">
                 <a14:useLocalDpi xmlns:a14="http://schemas.microsoft.com/office/drawing/2010/main" val="0"/>
@@ -5123,7 +5123,7 @@
           <p:nvPr/>
         </p:nvPicPr>
         <p:blipFill>
-          <a:blip r:embed="rId3">
+          <a:blip r:embed="rId3" cstate="print">
             <a:extLst>
               <a:ext uri="{28A0092B-C50C-407E-A947-70E740481C1C}">
                 <a14:useLocalDpi xmlns:a14="http://schemas.microsoft.com/office/drawing/2010/main" val="0"/>
@@ -5576,7 +5576,7 @@
           <p:nvPr/>
         </p:nvPicPr>
         <p:blipFill>
-          <a:blip r:embed="rId5">
+          <a:blip r:embed="rId5" cstate="print">
             <a:extLst>
               <a:ext uri="{28A0092B-C50C-407E-A947-70E740481C1C}">
                 <a14:useLocalDpi xmlns:a14="http://schemas.microsoft.com/office/drawing/2010/main" val="0"/>
@@ -5623,7 +5623,7 @@
           <p:nvPr/>
         </p:nvPicPr>
         <p:blipFill>
-          <a:blip r:embed="rId6">
+          <a:blip r:embed="rId6" cstate="print">
             <a:extLst>
               <a:ext uri="{28A0092B-C50C-407E-A947-70E740481C1C}">
                 <a14:useLocalDpi xmlns:a14="http://schemas.microsoft.com/office/drawing/2010/main" val="0"/>
@@ -5670,7 +5670,7 @@
           <p:nvPr/>
         </p:nvPicPr>
         <p:blipFill>
-          <a:blip r:embed="rId7">
+          <a:blip r:embed="rId7" cstate="print">
             <a:extLst>
               <a:ext uri="{28A0092B-C50C-407E-A947-70E740481C1C}">
                 <a14:useLocalDpi xmlns:a14="http://schemas.microsoft.com/office/drawing/2010/main" val="0"/>
@@ -5717,7 +5717,7 @@
           <p:nvPr/>
         </p:nvPicPr>
         <p:blipFill>
-          <a:blip r:embed="rId8">
+          <a:blip r:embed="rId8" cstate="print">
             <a:extLst>
               <a:ext uri="{28A0092B-C50C-407E-A947-70E740481C1C}">
                 <a14:useLocalDpi xmlns:a14="http://schemas.microsoft.com/office/drawing/2010/main" val="0"/>
@@ -6538,7 +6538,7 @@
           <p:nvPr/>
         </p:nvPicPr>
         <p:blipFill>
-          <a:blip r:embed="rId2">
+          <a:blip r:embed="rId2" cstate="print">
             <a:extLst>
               <a:ext uri="{28A0092B-C50C-407E-A947-70E740481C1C}">
                 <a14:useLocalDpi xmlns:a14="http://schemas.microsoft.com/office/drawing/2010/main" val="0"/>
@@ -6585,7 +6585,7 @@
           <p:nvPr/>
         </p:nvPicPr>
         <p:blipFill>
-          <a:blip r:embed="rId3">
+          <a:blip r:embed="rId3" cstate="print">
             <a:extLst>
               <a:ext uri="{28A0092B-C50C-407E-A947-70E740481C1C}">
                 <a14:useLocalDpi xmlns:a14="http://schemas.microsoft.com/office/drawing/2010/main" val="0"/>
@@ -7323,9 +7323,26 @@
               </a:lnSpc>
             </a:pPr>
             <a:r>
-              <a:rPr lang="en-US"/>
-              <a:t>Phát thảo ý tưởng</a:t>
-            </a:r>
+              <a:rPr lang="en-US" dirty="0" err="1"/>
+              <a:t>Phác</a:t>
+            </a:r>
+            <a:r>
+              <a:rPr lang="en-US" dirty="0"/>
+              <a:t> </a:t>
+            </a:r>
+            <a:r>
+              <a:rPr lang="en-US" dirty="0" err="1"/>
+              <a:t>thảo</a:t>
+            </a:r>
+            <a:r>
+              <a:rPr lang="en-US" dirty="0"/>
+              <a:t> ý </a:t>
+            </a:r>
+            <a:r>
+              <a:rPr lang="en-US" dirty="0" err="1"/>
+              <a:t>tưởng</a:t>
+            </a:r>
+            <a:endParaRPr lang="en-US" dirty="0"/>
           </a:p>
         </p:txBody>
       </p:sp>
@@ -7454,7 +7471,7 @@
           <p:nvPr/>
         </p:nvPicPr>
         <p:blipFill>
-          <a:blip r:embed="rId3">
+          <a:blip r:embed="rId3" cstate="print">
             <a:extLst>
               <a:ext uri="{28A0092B-C50C-407E-A947-70E740481C1C}">
                 <a14:useLocalDpi xmlns:a14="http://schemas.microsoft.com/office/drawing/2010/main" val="0"/>
@@ -7759,7 +7776,7 @@
           <p:nvPr/>
         </p:nvPicPr>
         <p:blipFill>
-          <a:blip r:embed="rId3">
+          <a:blip r:embed="rId3" cstate="print">
             <a:extLst>
               <a:ext uri="{28A0092B-C50C-407E-A947-70E740481C1C}">
                 <a14:useLocalDpi xmlns:a14="http://schemas.microsoft.com/office/drawing/2010/main" val="0"/>
@@ -8003,7 +8020,7 @@
           <p:nvPr/>
         </p:nvPicPr>
         <p:blipFill>
-          <a:blip r:embed="rId3">
+          <a:blip r:embed="rId3" cstate="print">
             <a:extLst>
               <a:ext uri="{28A0092B-C50C-407E-A947-70E740481C1C}">
                 <a14:useLocalDpi xmlns:a14="http://schemas.microsoft.com/office/drawing/2010/main" val="0"/>
@@ -8394,7 +8411,7 @@
           <p:nvPr/>
         </p:nvPicPr>
         <p:blipFill>
-          <a:blip r:embed="rId2">
+          <a:blip r:embed="rId2" cstate="print">
             <a:extLst>
               <a:ext uri="{28A0092B-C50C-407E-A947-70E740481C1C}">
                 <a14:useLocalDpi xmlns:a14="http://schemas.microsoft.com/office/drawing/2010/main" val="0"/>
@@ -11997,7 +12014,7 @@
           <p:nvPr/>
         </p:nvPicPr>
         <p:blipFill>
-          <a:blip r:embed="rId2">
+          <a:blip r:embed="rId2" cstate="print">
             <a:extLst>
               <a:ext uri="{28A0092B-C50C-407E-A947-70E740481C1C}">
                 <a14:useLocalDpi xmlns:a14="http://schemas.microsoft.com/office/drawing/2010/main" val="0"/>
@@ -12044,7 +12061,7 @@
           <p:nvPr/>
         </p:nvPicPr>
         <p:blipFill>
-          <a:blip r:embed="rId3">
+          <a:blip r:embed="rId3" cstate="print">
             <a:extLst>
               <a:ext uri="{28A0092B-C50C-407E-A947-70E740481C1C}">
                 <a14:useLocalDpi xmlns:a14="http://schemas.microsoft.com/office/drawing/2010/main" val="0"/>
@@ -12463,7 +12480,7 @@
           <p:nvPr/>
         </p:nvPicPr>
         <p:blipFill>
-          <a:blip r:embed="rId3">
+          <a:blip r:embed="rId3" cstate="print">
             <a:extLst>
               <a:ext uri="{28A0092B-C50C-407E-A947-70E740481C1C}">
                 <a14:useLocalDpi xmlns:a14="http://schemas.microsoft.com/office/drawing/2010/main" val="0"/>
@@ -12751,7 +12768,7 @@
           <p:nvPr/>
         </p:nvPicPr>
         <p:blipFill>
-          <a:blip r:embed="rId2">
+          <a:blip r:embed="rId2" cstate="print">
             <a:extLst>
               <a:ext uri="{28A0092B-C50C-407E-A947-70E740481C1C}">
                 <a14:useLocalDpi xmlns:a14="http://schemas.microsoft.com/office/drawing/2010/main" val="0"/>
@@ -12798,7 +12815,7 @@
           <p:nvPr/>
         </p:nvPicPr>
         <p:blipFill>
-          <a:blip r:embed="rId3">
+          <a:blip r:embed="rId3" cstate="print">
             <a:extLst>
               <a:ext uri="{28A0092B-C50C-407E-A947-70E740481C1C}">
                 <a14:useLocalDpi xmlns:a14="http://schemas.microsoft.com/office/drawing/2010/main" val="0"/>
@@ -13520,7 +13537,7 @@
           <p:nvPr/>
         </p:nvPicPr>
         <p:blipFill>
-          <a:blip r:embed="rId2">
+          <a:blip r:embed="rId2" cstate="print">
             <a:extLst>
               <a:ext uri="{28A0092B-C50C-407E-A947-70E740481C1C}">
                 <a14:useLocalDpi xmlns:a14="http://schemas.microsoft.com/office/drawing/2010/main" val="0"/>
@@ -13567,7 +13584,7 @@
           <p:nvPr/>
         </p:nvPicPr>
         <p:blipFill>
-          <a:blip r:embed="rId3">
+          <a:blip r:embed="rId3" cstate="print">
             <a:extLst>
               <a:ext uri="{28A0092B-C50C-407E-A947-70E740481C1C}">
                 <a14:useLocalDpi xmlns:a14="http://schemas.microsoft.com/office/drawing/2010/main" val="0"/>
